--- a/necessity_domain_matrix.pptx
+++ b/necessity_domain_matrix.pptx
@@ -3149,7 +3149,7 @@
                   <a:srgbClr val="8A8F98"/>
                 </a:solidFill>
               </a:rPr>
-              <a:t>49 catalogued instruments by necessity tier (rows) and domain (columns).  Dot colour = stakeholder source.  Winnowed to the 30 scored in Chapter 7.</a:t>
+              <a:t>49 catalogued instruments by necessity tier (rows) and domain (columns).  Dot colour = stakeholder source.  Winnowed to the 30 scored in Chapter 6.</a:t>
             </a:r>
           </a:p>
         </p:txBody>
@@ -3387,7 +3387,7 @@
                   <a:srgbClr val="1A1A1A"/>
                 </a:solidFill>
               </a:rPr>
-              <a:t>Fisheries Control Reg</a:t>
+              <a:t>Fisheries Control Regulation</a:t>
             </a:r>
           </a:p>
           <a:p>
@@ -3491,7 +3491,7 @@
                   <a:srgbClr val="8A8F98"/>
                 </a:solidFill>
               </a:rPr>
-              <a:t>Marine Strategy Framework Dir</a:t>
+              <a:t>Marine Strategy Framework Directive</a:t>
             </a:r>
           </a:p>
           <a:p>
@@ -3819,7 +3819,7 @@
                   <a:srgbClr val="8A8F98"/>
                 </a:solidFill>
               </a:rPr>
-              <a:t>Waste Framework Dir (EPR)</a:t>
+              <a:t>Waste Framework Directive (EPR)</a:t>
             </a:r>
           </a:p>
           <a:p>
@@ -4185,7 +4185,7 @@
                   <a:srgbClr val="B4B8BE"/>
                 </a:solidFill>
               </a:rPr>
-              <a:t>Fisheries labour conditions Dir</a:t>
+              <a:t>Fisheries labour conditions Directive</a:t>
             </a:r>
           </a:p>
         </p:txBody>
@@ -5121,7 +5121,7 @@
                   <a:srgbClr val="B4B8BE"/>
                 </a:solidFill>
               </a:rPr>
-              <a:t>Dow Jones Sust. Index</a:t>
+              <a:t>Dow Jones Best-in-Class</a:t>
             </a:r>
           </a:p>
         </p:txBody>
